--- a/Brigade_Vibeathon6_Submission.pptx
+++ b/Brigade_Vibeathon6_Submission.pptx
@@ -911,7 +911,19 @@
           <a:p/>
           <a:p>
             <a:r>
-              <a:t>What is verified — 70 unit tests on the runway engine; 27 assertions against a throwaway Postgres that applies every migration and patch twice; 21 end-to-end blocks driving the real HTTP API as the ten seeded people; 11 routes timed, failing over 5 seconds.</a:t>
+              <a:t>What is verified — 70 unit tests on the runway engine; 27 assertions against a throwaway Postgres that applies every migration and patch twice; 21 end-to-end blocks holding 120 assertions, driving the real HTTP API as the ten seeded people; 11 routes timed, failing over 5 seconds.</a:t>
+            </a:r>
+          </a:p>
+          <a:p/>
+          <a:p>
+            <a:r>
+              <a:t>Testing the interface — 22 of those 120 assertions read the RENDERED HTML rather than an API response. They check that every runway gauge carries a spoken label and that the spoken text AGREES with what is on screen; that the phone header collapses but never hides the cart; that the collapse button is announced as a menu rather than an unlabelled button; that action buttons declare aria-busy instead of just going grey; that both shells show a skeleton while a page renders; that the spinner has a reduced-motion form so it cannot freeze mid-spin; and that no page is reachable only by typing its address. The eight colour tokens are contrast-checked by computation, not by eye — three of them failed when first measured.</a:t>
+            </a:r>
+          </a:p>
+          <a:p/>
+          <a:p>
+            <a:r>
+              <a:t>And the honest limit — there is no browser-driven suite. Visual rendering, legibility at two metres, the 375px layout and keyboard traversal are checked by hand, and this deck says so rather than implying coverage that does not exist. What IS automated is everything a script can see in the markup, which is where the accessibility and dead-end bugs lived.</a:t>
             </a:r>
           </a:p>
           <a:p/>
@@ -4830,7 +4842,7 @@
             </a:pPr>
             <a:r>
               <a:rPr sz="1100" b="0"/>
-              <a:t>70 unit tests; 27 database assertions</a:t>
+              <a:t>70 unit tests · 27 database assertions</a:t>
             </a:r>
           </a:p>
           <a:p>
@@ -4841,7 +4853,7 @@
             </a:pPr>
             <a:r>
               <a:rPr sz="1100" b="0"/>
-              <a:t>21 end-to-end blocks as the 10 seeded people</a:t>
+              <a:t>120 end-to-end assertions as the 10 real people</a:t>
             </a:r>
           </a:p>
           <a:p>
@@ -4852,7 +4864,7 @@
             </a:pPr>
             <a:r>
               <a:rPr sz="1100" b="0"/>
-              <a:t>Adversarial audit: 44 findings, each refuted</a:t>
+              <a:t>22 read the rendered HTML: aria, links, dead ends</a:t>
             </a:r>
           </a:p>
           <a:p>
@@ -4863,7 +4875,7 @@
             </a:pPr>
             <a:r>
               <a:rPr sz="1100" b="0"/>
-              <a:t>The refusals are tested, not the happy path</a:t>
+              <a:t>Adversarial audit: 44 findings, each refuted</a:t>
             </a:r>
           </a:p>
         </p:txBody>

--- a/Brigade_Vibeathon6_Submission.pptx
+++ b/Brigade_Vibeathon6_Submission.pptx
@@ -9,9 +9,7 @@
     <p:sldId id="257" r:id="rId4"/>
     <p:sldId id="258" r:id="rId5"/>
     <p:sldId id="259" r:id="rId6"/>
-    <p:sldId id="262" r:id="rId12"/>
     <p:sldId id="260" r:id="rId7"/>
-    <p:sldId id="263" r:id="rId13"/>
     <p:sldId id="261" r:id="rId8"/>
   </p:sldIdLst>
   <p:sldSz cx="12192000" cy="6858000"/>
@@ -623,31 +621,43 @@
           <a:lstStyle/>
           <a:p>
             <a:r>
-              <a:t>Technologies — Next.js 15 App Router, TypeScript, Supabase (Postgres, Auth, Realtime, Row Level Security), Tailwind v4, Recharts, Vercel.</a:t>
+              <a:t>Technologies — Next.js 15 App Router, TypeScript, Supabase (Postgres, Auth, Realtime, Row Level Security), Tailwind v4, Recharts, Vercel. One deployable: route handlers are the API, and they run on Node, so there is no separate Express service.</a:t>
             </a:r>
           </a:p>
           <a:p/>
           <a:p>
             <a:r>
-              <a:t>Architecture — one deployable. Next.js route handlers are the API; they run on Node, so there is no separate Express service. Postgres is not a store behind the app, it is where the rules live.</a:t>
+              <a:t>Four decisions that shape everything — availability is COMPUTED, never stored, so there is no is_available column to drift. Stock is an append-only LEDGER and stock_qty is a projection of it. Authorization is 43 RLS policies, not UI conditionals. Money is integer paise, never floats.</a:t>
             </a:r>
           </a:p>
           <a:p/>
           <a:p>
             <a:r>
-              <a:t>Four decisions that shape everything — availability is COMPUTED, never stored, so there is no is_available column to drift. Stock is an append-only LEDGER and stock_qty is a projection of it. Authorization is 43 RLS policies, not UI conditionals. Money is integer paise, never floats.</a:t>
+              <a:t>The hard part — place_order() locks the affected ingredient rows FOR UPDATE ordered by id, a deterministic order so concurrent orders cannot deadlock; re-checks availability inside the transaction; aggregates demand per ingredient across the whole order; then writes items and ledger, or raises a typed error. Two guests tapping for the last portion: exactly one succeeds.</a:t>
             </a:r>
           </a:p>
           <a:p/>
           <a:p>
             <a:r>
-              <a:t>The hard part — place_order() locks the affected ingredient rows FOR UPDATE ordered by id, a deterministic order so concurrent orders cannot deadlock; re-checks availability inside the transaction; aggregates demand per ingredient across the whole order; then writes items and ledger, or raises a typed error. Two guests tapping for the last portion: exactly one succeeds.</a:t>
+              <a:t>On AI — no LLM in the product, by decision. The intelligence layer is deterministic statistics: EWMA forecasting, reorder points, Kasavana–Smith, cosine-similarity recommendations. Auditable, reproducible, and it cannot fail on a rate limit mid-demo. AI wrote the code, which is the point of a vibecoding hackathon.</a:t>
             </a:r>
           </a:p>
           <a:p/>
           <a:p>
             <a:r>
-              <a:t>On AI — no LLM in the product, by decision. The intelligence layer is deterministic statistics: EWMA forecasting, reorder points, Kasavana–Smith, cosine-similarity recommendations. Auditable, reproducible, and it cannot fail on a rate limit mid-demo. AI wrote the code, which is the point of a vibecoding hackathon.</a:t>
+              <a:t>HOW WE KNOW IT WORKS — one command, npm run check, asks seven questions each phrased the way a non-technical person would, because a green tick nobody can interpret is not a check. It runs 70 unit tests on the runway engine; 27 assertions against a throwaway Postgres that applies every migration and patch twice; 21 end-to-end blocks holding 120 assertions that drive the real HTTP API as the ten seeded people; and times 11 routes, failing over 5s.</a:t>
+            </a:r>
+          </a:p>
+          <a:p/>
+          <a:p>
+            <a:r>
+              <a:t>Testing the interface — 22 of those 120 assertions read the RENDERED HTML rather than an API response: that every runway gauge carries a spoken label and that the spoken text AGREES with what is on screen; that the phone header collapses but never hides the cart; that buttons declare aria-busy instead of just going grey; that both shells show a skeleton while a page renders; that the spinner has a reduced-motion form so it cannot freeze mid-spin; and that no page is reachable only by typing its address. The eight colour tokens are contrast-checked by computation, not by eye — three failed when first measured. The honest limit: there is no browser-driven suite, so visual rendering, legibility at two metres, the 375px layout and keyboard traversal are checked by hand.</a:t>
+            </a:r>
+          </a:p>
+          <a:p/>
+          <a:p>
+            <a:r>
+              <a:t>Adversarial review — a multi-agent audit of the LIVE deployment produced 44 confirmed findings, each handed to a separate agent instructed to refute it. Three were cases where this repo's own documentation claimed a guarantee that did not exist; they are recorded in docs/07-submission.md rather than quietly fixed. Two it caught: every Postgres view accepted writes from anonymous callers, so a chef could rewrite stock with no ledger row while the base table correctly refused; and /ops/analytics showed a 5.9% food cost, computed from 1000 of 4381 rows, because PostgREST caps responses and a client .limit() cannot raise it.</a:t>
             </a:r>
           </a:p>
         </p:txBody>
@@ -744,6 +754,12 @@
               <a:t>Measurable outcomes — every claim on the ops screens is recomputed from the order ledger; no figure is typed in. Food cost is stated against the 28–32% industry band, and waste variance compares theoretical depletion against the actual ledger, so stock leaving without being sold is visible rather than inferred.</a:t>
             </a:r>
           </a:p>
+          <a:p/>
+          <a:p>
+            <a:r>
+              <a:t>TRY IT YOURSELF — https://brigade-flame.vercel.app , code at https://github.com/bishalbar77/brigade. Password brigade-demo-2026 for owner@brigade.test (the numbers), manager@brigade.test (the pantry), grill@brigade.test (a station), expo@brigade.test (the pass), server@brigade.test (the floor), host@brigade.test (the book), priya@brigade.test (a diner). A five-minute path: /menu on a phone shows a dish with "3 left · 86s ~19:46" — that number is the pantry, not a setting. /ops/runway shows the same dish counting down and names the ingredient that binds it. Order it on the phone and the count drops on both screens. On /ops/kds as the grill chef, fire it, cook it, plate it — then press Served and be refused, because that is the pass's call; sign in as expo and it works. Finally /ops/analytics as the owner: four populated quadrants from six weeks of trading, then the same page as the chef, with no margin, no matrix, and a line saying why.</a:t>
+            </a:r>
+          </a:p>
         </p:txBody>
       </p:sp>
       <p:sp>
@@ -836,219 +852,6 @@
           <a:p>
             <a:r>
               <a:t>Conclusion — existing tills tell you a dish IS out. Brigade works out WHEN it will be, tells the kitchen while there is still time to act, and shows the diner before they order. It is deployed, tested end to end, and every number on it is computed from the ledger.</a:t>
-            </a:r>
-          </a:p>
-        </p:txBody>
-      </p:sp>
-      <p:sp>
-        <p:nvSpPr>
-          <p:cNvPr id="4" name="Slide Number Placeholder 3"/>
-          <p:cNvSpPr>
-            <a:spLocks noGrp="1"/>
-          </p:cNvSpPr>
-          <p:nvPr>
-            <p:ph type="sldNum" idx="5" sz="quarter"/>
-          </p:nvPr>
-        </p:nvSpPr>
-        <p:spPr/>
-      </p:sp>
-    </p:spTree>
-  </p:cSld>
-  <p:clrMapOvr>
-    <a:masterClrMapping/>
-  </p:clrMapOvr>
-</p:notes>
-</file>
-
-<file path=ppt/notesSlides/notesSlide6.xml><?xml version="1.0" encoding="utf-8"?>
-<p:notes xmlns:a="http://schemas.openxmlformats.org/drawingml/2006/main" xmlns:p="http://schemas.openxmlformats.org/presentationml/2006/main" xmlns:r="http://schemas.openxmlformats.org/officeDocument/2006/relationships">
-  <p:cSld>
-    <p:spTree>
-      <p:nvGrpSpPr>
-        <p:cNvPr id="1" name=""/>
-        <p:cNvGrpSpPr/>
-        <p:nvPr/>
-      </p:nvGrpSpPr>
-      <p:grpSpPr>
-        <a:xfrm>
-          <a:off x="0" y="0"/>
-          <a:ext cx="0" cy="0"/>
-          <a:chOff x="0" y="0"/>
-          <a:chExt cx="0" cy="0"/>
-        </a:xfrm>
-      </p:grpSpPr>
-      <p:sp>
-        <p:nvSpPr>
-          <p:cNvPr id="2" name="Slide Image Placeholder 1"/>
-          <p:cNvSpPr>
-            <a:spLocks noGrp="1"/>
-          </p:cNvSpPr>
-          <p:nvPr>
-            <p:ph type="sldImg" idx="2"/>
-          </p:nvPr>
-        </p:nvSpPr>
-        <p:spPr/>
-      </p:sp>
-      <p:sp>
-        <p:nvSpPr>
-          <p:cNvPr id="3" name="Notes Placeholder 2"/>
-          <p:cNvSpPr>
-            <a:spLocks noGrp="1"/>
-          </p:cNvSpPr>
-          <p:nvPr>
-            <p:ph type="body" idx="3" sz="quarter"/>
-          </p:nvPr>
-        </p:nvSpPr>
-        <p:spPr/>
-        <p:txBody>
-          <a:bodyPr/>
-          <a:lstStyle/>
-          <a:p>
-            <a:r>
-              <a:t>One command — npm run check asks seven questions, each phrased the way a non-technical person would ask it, because a green tick nobody can interpret is not a check.</a:t>
-            </a:r>
-          </a:p>
-          <a:p/>
-          <a:p>
-            <a:r>
-              <a:t>What is verified — 70 unit tests on the runway engine; 27 assertions against a throwaway Postgres that applies every migration and patch twice; 21 end-to-end blocks holding 120 assertions, driving the real HTTP API as the ten seeded people; 11 routes timed, failing over 5 seconds.</a:t>
-            </a:r>
-          </a:p>
-          <a:p/>
-          <a:p>
-            <a:r>
-              <a:t>Testing the interface — 22 of those 120 assertions read the RENDERED HTML rather than an API response. They check that every runway gauge carries a spoken label and that the spoken text AGREES with what is on screen; that the phone header collapses but never hides the cart; that the collapse button is announced as a menu rather than an unlabelled button; that action buttons declare aria-busy instead of just going grey; that both shells show a skeleton while a page renders; that the spinner has a reduced-motion form so it cannot freeze mid-spin; and that no page is reachable only by typing its address. The eight colour tokens are contrast-checked by computation, not by eye — three of them failed when first measured.</a:t>
-            </a:r>
-          </a:p>
-          <a:p/>
-          <a:p>
-            <a:r>
-              <a:t>And the honest limit — there is no browser-driven suite. Visual rendering, legibility at two metres, the 375px layout and keyboard traversal are checked by hand, and this deck says so rather than implying coverage that does not exist. What IS automated is everything a script can see in the markup, which is where the accessibility and dead-end bugs lived.</a:t>
-            </a:r>
-          </a:p>
-          <a:p/>
-          <a:p>
-            <a:r>
-              <a:t>Adversarial review — a multi-agent audit of the LIVE deployment produced 44 confirmed findings, each handed to a separate agent instructed to refute it. Three were cases where this repo's own documentation claimed a guarantee that did not exist; they are recorded in docs/07-submission.md rather than quietly fixed.</a:t>
-            </a:r>
-          </a:p>
-          <a:p/>
-          <a:p>
-            <a:r>
-              <a:t>Two examples of what that caught — every view in Postgres accepted writes from anonymous callers, so a chef could rewrite stock with no ledger row while the base table correctly refused. And /ops/analytics showed a 5.9% food cost, computed from 1000 of 4381 rows, because PostgREST caps responses and a client-side .limit() cannot raise it.</a:t>
-            </a:r>
-          </a:p>
-          <a:p/>
-          <a:p>
-            <a:r>
-              <a:t>Why it is in the deck — anyone can demo a happy path. The refusals are where the product is: a cook who cannot serve a plate, a bill that will not settle while food is still cooking, a diner who cannot read another diner's order.</a:t>
-            </a:r>
-          </a:p>
-        </p:txBody>
-      </p:sp>
-      <p:sp>
-        <p:nvSpPr>
-          <p:cNvPr id="4" name="Slide Number Placeholder 3"/>
-          <p:cNvSpPr>
-            <a:spLocks noGrp="1"/>
-          </p:cNvSpPr>
-          <p:nvPr>
-            <p:ph type="sldNum" idx="5" sz="quarter"/>
-          </p:nvPr>
-        </p:nvSpPr>
-        <p:spPr/>
-      </p:sp>
-    </p:spTree>
-  </p:cSld>
-  <p:clrMapOvr>
-    <a:masterClrMapping/>
-  </p:clrMapOvr>
-</p:notes>
-</file>
-
-<file path=ppt/notesSlides/notesSlide7.xml><?xml version="1.0" encoding="utf-8"?>
-<p:notes xmlns:a="http://schemas.openxmlformats.org/drawingml/2006/main" xmlns:p="http://schemas.openxmlformats.org/presentationml/2006/main" xmlns:r="http://schemas.openxmlformats.org/officeDocument/2006/relationships">
-  <p:cSld>
-    <p:spTree>
-      <p:nvGrpSpPr>
-        <p:cNvPr id="1" name=""/>
-        <p:cNvGrpSpPr/>
-        <p:nvPr/>
-      </p:nvGrpSpPr>
-      <p:grpSpPr>
-        <a:xfrm>
-          <a:off x="0" y="0"/>
-          <a:ext cx="0" cy="0"/>
-          <a:chOff x="0" y="0"/>
-          <a:chExt cx="0" cy="0"/>
-        </a:xfrm>
-      </p:grpSpPr>
-      <p:sp>
-        <p:nvSpPr>
-          <p:cNvPr id="2" name="Slide Image Placeholder 1"/>
-          <p:cNvSpPr>
-            <a:spLocks noGrp="1"/>
-          </p:cNvSpPr>
-          <p:nvPr>
-            <p:ph type="sldImg" idx="2"/>
-          </p:nvPr>
-        </p:nvSpPr>
-        <p:spPr/>
-      </p:sp>
-      <p:sp>
-        <p:nvSpPr>
-          <p:cNvPr id="3" name="Notes Placeholder 2"/>
-          <p:cNvSpPr>
-            <a:spLocks noGrp="1"/>
-          </p:cNvSpPr>
-          <p:nvPr>
-            <p:ph type="body" idx="3" sz="quarter"/>
-          </p:nvPr>
-        </p:nvSpPr>
-        <p:spPr/>
-        <p:txBody>
-          <a:bodyPr/>
-          <a:lstStyle/>
-          <a:p>
-            <a:r>
-              <a:t>Open it — https://brigade-flame.vercel.app. Code: https://github.com/bishalbar77/brigade</a:t>
-            </a:r>
-          </a:p>
-          <a:p/>
-          <a:p>
-            <a:r>
-              <a:t>Sign in as any of these, password brigade-demo-2026: owner@brigade.test (the numbers), manager@brigade.test (the pantry), grill@brigade.test (a station), expo@brigade.test (the pass), server@brigade.test (the floor), host@brigade.test (the book), priya@brigade.test (a diner).</a:t>
-            </a:r>
-          </a:p>
-          <a:p/>
-          <a:p>
-            <a:r>
-              <a:t>A five-minute path that tells the story:</a:t>
-            </a:r>
-          </a:p>
-          <a:p>
-            <a:r>
-              <a:t>1. /menu on a phone — a dish showing "3 left · 86s ~19:46". That number is the pantry, not a setting.</a:t>
-            </a:r>
-          </a:p>
-          <a:p>
-            <a:r>
-              <a:t>2. /ops/runway on a laptop — the same dish counting down, naming the ingredient that binds it.</a:t>
-            </a:r>
-          </a:p>
-          <a:p>
-            <a:r>
-              <a:t>3. Order it on the phone. The count drops on both screens.</a:t>
-            </a:r>
-          </a:p>
-          <a:p>
-            <a:r>
-              <a:t>4. /ops/kds as the grill chef — fire it, cook it, plate it. Then press Served: refused, because that is the pass's call. Sign in as expo and it works.</a:t>
-            </a:r>
-          </a:p>
-          <a:p>
-            <a:r>
-              <a:t>5. /ops/analytics as the owner — four populated quadrants from six weeks of trading. Then the same page as the chef: no margin, no matrix, and a line saying why.</a:t>
             </a:r>
           </a:p>
         </p:txBody>
@@ -2520,7 +2323,12 @@
               </a:spcAft>
             </a:pPr>
             <a:r>
-              <a:rPr sz="1300" b="1"/>
+              <a:rPr sz="1200" b="1">
+                <a:solidFill>
+                  <a:srgbClr val="FFFFFF"/>
+                </a:solidFill>
+                <a:latin typeface="Trebuchet MS"/>
+              </a:rPr>
               <a:t>Brigade — the menu as a live function of the pantry</a:t>
             </a:r>
             <a:endParaRPr sz="3600">
@@ -2534,10 +2342,6 @@
                 <a:spcPts val="200"/>
               </a:spcAft>
             </a:pPr>
-            <a:r>
-              <a:rPr sz="1300" b="0"/>
-              <a:t>Team Name: bishalranabr7</a:t>
-            </a:r>
           </a:p>
           <a:p>
             <a:pPr>
@@ -2546,8 +2350,13 @@
               </a:spcAft>
             </a:pPr>
             <a:r>
-              <a:rPr sz="1300" b="0"/>
-              <a:t>Team Leader: Bishal Rana</a:t>
+              <a:rPr sz="1200" b="0">
+                <a:solidFill>
+                  <a:srgbClr val="FFFFFF"/>
+                </a:solidFill>
+                <a:latin typeface="Trebuchet MS"/>
+              </a:rPr>
+              <a:t>Team Name: bishalranabr7</a:t>
             </a:r>
           </a:p>
           <a:p>
@@ -2557,8 +2366,13 @@
               </a:spcAft>
             </a:pPr>
             <a:r>
-              <a:rPr sz="1300" b="0"/>
-              <a:t>College: Parala Maharaja Engineering College</a:t>
+              <a:rPr sz="1200" b="0">
+                <a:solidFill>
+                  <a:srgbClr val="FFFFFF"/>
+                </a:solidFill>
+                <a:latin typeface="Trebuchet MS"/>
+              </a:rPr>
+              <a:t>Team Leader: Bishal Rana</a:t>
             </a:r>
           </a:p>
           <a:p>
@@ -2568,8 +2382,13 @@
               </a:spcAft>
             </a:pPr>
             <a:r>
-              <a:rPr sz="1300" b="0"/>
-              <a:t>Year &amp; Department: CSE — 2023 batch</a:t>
+              <a:rPr sz="1200" b="0">
+                <a:solidFill>
+                  <a:srgbClr val="FFFFFF"/>
+                </a:solidFill>
+                <a:latin typeface="Trebuchet MS"/>
+              </a:rPr>
+              <a:t>College: Parala Maharaja Engineering College</a:t>
             </a:r>
           </a:p>
           <a:p>
@@ -2579,8 +2398,13 @@
               </a:spcAft>
             </a:pPr>
             <a:r>
-              <a:rPr sz="1300" b="0"/>
-              <a:t>Problem Statement: Smart Restaurant Management System</a:t>
+              <a:rPr sz="1200" b="0">
+                <a:solidFill>
+                  <a:srgbClr val="FFFFFF"/>
+                </a:solidFill>
+                <a:latin typeface="Trebuchet MS"/>
+              </a:rPr>
+              <a:t>Year &amp; Department: CSE — 2023 batch</a:t>
             </a:r>
           </a:p>
           <a:p>
@@ -2590,8 +2414,13 @@
               </a:spcAft>
             </a:pPr>
             <a:r>
-              <a:rPr sz="1300" b="0"/>
-              <a:t>Live: https://brigade-flame.vercel.app</a:t>
+              <a:rPr sz="1200" b="0">
+                <a:solidFill>
+                  <a:srgbClr val="FFFFFF"/>
+                </a:solidFill>
+                <a:latin typeface="Trebuchet MS"/>
+              </a:rPr>
+              <a:t>Problem Statement: Smart Restaurant Management System</a:t>
             </a:r>
           </a:p>
           <a:p>
@@ -2600,9 +2429,69 @@
                 <a:spcPts val="200"/>
               </a:spcAft>
             </a:pPr>
-            <a:r>
-              <a:rPr sz="1300" b="0"/>
+          </a:p>
+          <a:p>
+            <a:pPr>
+              <a:spcAft>
+                <a:spcPts val="200"/>
+              </a:spcAft>
+            </a:pPr>
+            <a:r>
+              <a:rPr sz="1200" b="0">
+                <a:solidFill>
+                  <a:srgbClr val="FFFFFF"/>
+                </a:solidFill>
+                <a:latin typeface="Trebuchet MS"/>
+              </a:rPr>
+              <a:t>Live now: https://brigade-flame.vercel.app</a:t>
+            </a:r>
+          </a:p>
+          <a:p>
+            <a:pPr>
+              <a:spcAft>
+                <a:spcPts val="200"/>
+              </a:spcAft>
+            </a:pPr>
+            <a:r>
+              <a:rPr sz="1200" b="0">
+                <a:solidFill>
+                  <a:srgbClr val="FFFFFF"/>
+                </a:solidFill>
+                <a:latin typeface="Trebuchet MS"/>
+              </a:rPr>
               <a:t>Code: https://github.com/bishalbar77/brigade</a:t>
+            </a:r>
+          </a:p>
+          <a:p>
+            <a:pPr>
+              <a:spcAft>
+                <a:spcPts val="200"/>
+              </a:spcAft>
+            </a:pPr>
+            <a:r>
+              <a:rPr sz="1200" b="0">
+                <a:solidFill>
+                  <a:srgbClr val="FFFFFF"/>
+                </a:solidFill>
+                <a:latin typeface="Trebuchet MS"/>
+              </a:rPr>
+              <a:t>Sign in as owner@brigade.test / grill@brigade.test / priya@brigade.test</a:t>
+            </a:r>
+          </a:p>
+          <a:p>
+            <a:pPr>
+              <a:spcAft>
+                <a:spcPts val="200"/>
+              </a:spcAft>
+            </a:pPr>
+            <a:r>
+              <a:rPr sz="1200" b="0">
+                <a:solidFill>
+                  <a:srgbClr val="FFFFFF"/>
+                </a:solidFill>
+                <a:latin typeface="Trebuchet MS"/>
+              </a:rPr>
+              <a:t>Password for every demo account: brigade-demo-2026</a:t>
             </a:r>
           </a:p>
         </p:txBody>
@@ -2860,57 +2749,82 @@
                 <a:spcPts val="95"/>
               </a:spcBef>
               <a:spcAft>
-                <a:spcPts val="200"/>
+                <a:spcPts val="3629"/>
               </a:spcAft>
             </a:pPr>
             <a:r>
-              <a:rPr sz="1100" b="0"/>
-              <a:t>A printed menu promises what stock cannot keep</a:t>
+              <a:rPr sz="1100" b="0">
+                <a:solidFill>
+                  <a:srgbClr val="FFFFFF"/>
+                </a:solidFill>
+                <a:latin typeface="Trebuchet MS"/>
+              </a:rPr>
+              <a:t>A menu promises what stock cannot keep</a:t>
             </a:r>
             <a:endParaRPr spc="-10" dirty="0"/>
           </a:p>
           <a:p>
             <a:pPr>
               <a:spcAft>
-                <a:spcPts val="200"/>
+                <a:spcPts val="3629"/>
               </a:spcAft>
             </a:pPr>
             <a:r>
-              <a:rPr sz="1100" b="0"/>
-              <a:t>Diners, cooks and owners all guess at what is left</a:t>
+              <a:rPr sz="1100" b="0">
+                <a:solidFill>
+                  <a:srgbClr val="FFFFFF"/>
+                </a:solidFill>
+                <a:latin typeface="Trebuchet MS"/>
+              </a:rPr>
+              <a:t>Diners, cooks and owners all guess</a:t>
             </a:r>
           </a:p>
           <a:p>
             <a:pPr>
               <a:spcAft>
-                <a:spcPts val="200"/>
+                <a:spcPts val="3629"/>
               </a:spcAft>
             </a:pPr>
             <a:r>
-              <a:rPr sz="1100" b="0"/>
-              <a:t>Asked verbally, stale by the time it is answered</a:t>
+              <a:rPr sz="1100" b="0">
+                <a:solidFill>
+                  <a:srgbClr val="FFFFFF"/>
+                </a:solidFill>
+                <a:latin typeface="Trebuchet MS"/>
+              </a:rPr>
+              <a:t>Asked verbally, stale when answered</a:t>
             </a:r>
           </a:p>
           <a:p>
             <a:pPr>
               <a:spcAft>
-                <a:spcPts val="200"/>
+                <a:spcPts val="3629"/>
               </a:spcAft>
             </a:pPr>
             <a:r>
-              <a:rPr sz="1100" b="0"/>
-              <a:t>Tills already auto-86 — none of them predict</a:t>
+              <a:rPr sz="1100" b="0">
+                <a:solidFill>
+                  <a:srgbClr val="FFFFFF"/>
+                </a:solidFill>
+                <a:latin typeface="Trebuchet MS"/>
+              </a:rPr>
+              <a:t>Tills already auto-86 — none predict</a:t>
             </a:r>
           </a:p>
           <a:p>
             <a:pPr>
               <a:spcAft>
-                <a:spcPts val="200"/>
+                <a:spcPts val="3629"/>
               </a:spcAft>
             </a:pPr>
             <a:r>
-              <a:rPr sz="1100" b="0"/>
-              <a:t>4–10% of food wasted; food cost 28–32% of revenue</a:t>
+              <a:rPr sz="1100" b="0">
+                <a:solidFill>
+                  <a:srgbClr val="FFFFFF"/>
+                </a:solidFill>
+                <a:latin typeface="Trebuchet MS"/>
+              </a:rPr>
+              <a:t>4–10% food wasted; cost 28–32%</a:t>
             </a:r>
           </a:p>
         </p:txBody>
@@ -2948,7 +2862,12 @@
               </a:spcAft>
             </a:pPr>
             <a:r>
-              <a:rPr sz="1000" b="0"/>
+              <a:rPr sz="1000" b="0">
+                <a:solidFill>
+                  <a:srgbClr val="FFFFFF"/>
+                </a:solidFill>
+                <a:latin typeface="Trebuchet MS"/>
+              </a:rPr>
               <a:t>bishalranabr7</a:t>
             </a:r>
             <a:endParaRPr sz="1350">
@@ -3104,7 +3023,12 @@
               </a:spcAft>
             </a:pPr>
             <a:r>
-              <a:rPr sz="1000" b="0"/>
+              <a:rPr sz="1000" b="0">
+                <a:solidFill>
+                  <a:srgbClr val="FFFFFF"/>
+                </a:solidFill>
+                <a:latin typeface="Trebuchet MS"/>
+              </a:rPr>
               <a:t>bishalranabr7</a:t>
             </a:r>
             <a:endParaRPr sz="1100">
@@ -3298,12 +3222,17 @@
                 <a:spcPts val="130"/>
               </a:spcBef>
               <a:spcAft>
-                <a:spcPts val="200"/>
+                <a:spcPts val="1980"/>
               </a:spcAft>
             </a:pPr>
             <a:r>
-              <a:rPr sz="1100" b="0"/>
-              <a:t>Runway: minutes until each dish 86s tonight</a:t>
+              <a:rPr sz="1100" b="0">
+                <a:solidFill>
+                  <a:srgbClr val="FFFFFF"/>
+                </a:solidFill>
+                <a:latin typeface="Trebuchet MS"/>
+              </a:rPr>
+              <a:t>Runway: minutes until a dish 86s</a:t>
             </a:r>
             <a:endParaRPr sz="2750">
               <a:latin typeface="Trebuchet MS" panose="020B0603020202020204"/>
@@ -3313,45 +3242,65 @@
           <a:p>
             <a:pPr>
               <a:spcAft>
-                <a:spcPts val="200"/>
+                <a:spcPts val="1980"/>
               </a:spcAft>
             </a:pPr>
             <a:r>
-              <a:rPr sz="1100" b="0"/>
-              <a:t>portions ÷ sell rate, from recipe and live stock</a:t>
+              <a:rPr sz="1100" b="0">
+                <a:solidFill>
+                  <a:srgbClr val="FFFFFF"/>
+                </a:solidFill>
+                <a:latin typeface="Trebuchet MS"/>
+              </a:rPr>
+              <a:t>portions ÷ tonight's real sell rate</a:t>
             </a:r>
           </a:p>
           <a:p>
             <a:pPr>
               <a:spcAft>
-                <a:spcPts val="200"/>
+                <a:spcPts val="1980"/>
               </a:spcAft>
             </a:pPr>
             <a:r>
-              <a:rPr sz="1100" b="0"/>
-              <a:t>Live menu, atomic ordering, KDS, runway board</a:t>
+              <a:rPr sz="1100" b="0">
+                <a:solidFill>
+                  <a:srgbClr val="FFFFFF"/>
+                </a:solidFill>
+                <a:latin typeface="Trebuchet MS"/>
+              </a:rPr>
+              <a:t>Menu, ordering, KDS, runway board</a:t>
             </a:r>
           </a:p>
           <a:p>
             <a:pPr>
               <a:spcAft>
-                <a:spcPts val="200"/>
+                <a:spcPts val="1980"/>
               </a:spcAft>
             </a:pPr>
             <a:r>
-              <a:rPr sz="1100" b="0"/>
-              <a:t>Availability reaches the diner, not just the till</a:t>
+              <a:rPr sz="1100" b="0">
+                <a:solidFill>
+                  <a:srgbClr val="FFFFFF"/>
+                </a:solidFill>
+                <a:latin typeface="Trebuchet MS"/>
+              </a:rPr>
+              <a:t>Availability reaches the diner</a:t>
             </a:r>
           </a:p>
           <a:p>
             <a:pPr>
               <a:spcAft>
-                <a:spcPts val="200"/>
+                <a:spcPts val="1980"/>
               </a:spcAft>
             </a:pPr>
             <a:r>
-              <a:rPr sz="1100" b="0"/>
-              <a:t>Scarcity predicted, not reported — time to act</a:t>
+              <a:rPr sz="1100" b="0">
+                <a:solidFill>
+                  <a:srgbClr val="FFFFFF"/>
+                </a:solidFill>
+                <a:latin typeface="Trebuchet MS"/>
+              </a:rPr>
+              <a:t>Predicted, not reported — time to act</a:t>
             </a:r>
           </a:p>
         </p:txBody>
@@ -3525,7 +3474,12 @@
               </a:spcAft>
             </a:pPr>
             <a:r>
-              <a:rPr sz="1000" b="0"/>
+              <a:rPr sz="1000" b="0">
+                <a:solidFill>
+                  <a:srgbClr val="FFFFFF"/>
+                </a:solidFill>
+                <a:latin typeface="Trebuchet MS"/>
+              </a:rPr>
               <a:t>bishalranabr7</a:t>
             </a:r>
             <a:endParaRPr sz="1100">
@@ -3674,12 +3628,17 @@
                 <a:spcPts val="130"/>
               </a:spcBef>
               <a:spcAft>
-                <a:spcPts val="200"/>
+                <a:spcPts val="1980"/>
               </a:spcAft>
             </a:pPr>
             <a:r>
-              <a:rPr sz="1100" b="0"/>
-              <a:t>Next.js 15, TypeScript, Supabase, Vercel</a:t>
+              <a:rPr sz="1100" b="0">
+                <a:solidFill>
+                  <a:srgbClr val="FFFFFF"/>
+                </a:solidFill>
+                <a:latin typeface="Trebuchet MS"/>
+              </a:rPr>
+              <a:t>Next.js 15, TypeScript, Supabase</a:t>
             </a:r>
             <a:endParaRPr sz="2750">
               <a:latin typeface="Trebuchet MS" panose="020B0603020202020204"/>
@@ -3689,45 +3648,65 @@
           <a:p>
             <a:pPr>
               <a:spcAft>
-                <a:spcPts val="200"/>
+                <a:spcPts val="1980"/>
               </a:spcAft>
             </a:pPr>
             <a:r>
-              <a:rPr sz="1100" b="0"/>
-              <a:t>One deployable; route handlers are the API</a:t>
+              <a:rPr sz="1100" b="0">
+                <a:solidFill>
+                  <a:srgbClr val="FFFFFF"/>
+                </a:solidFill>
+                <a:latin typeface="Trebuchet MS"/>
+              </a:rPr>
+              <a:t>Availability computed, never stored</a:t>
             </a:r>
           </a:p>
           <a:p>
             <a:pPr>
               <a:spcAft>
-                <a:spcPts val="200"/>
+                <a:spcPts val="1980"/>
               </a:spcAft>
             </a:pPr>
             <a:r>
-              <a:rPr sz="1100" b="0"/>
-              <a:t>Availability computed, never stored — no drift</a:t>
+              <a:rPr sz="1100" b="0">
+                <a:solidFill>
+                  <a:srgbClr val="FFFFFF"/>
+                </a:solidFill>
+                <a:latin typeface="Trebuchet MS"/>
+              </a:rPr>
+              <a:t>Append-only ledger; 43 RLS policies</a:t>
             </a:r>
           </a:p>
           <a:p>
             <a:pPr>
               <a:spcAft>
-                <a:spcPts val="200"/>
+                <a:spcPts val="1980"/>
               </a:spcAft>
             </a:pPr>
             <a:r>
-              <a:rPr sz="1100" b="0"/>
-              <a:t>Append-only stock ledger; 43 RLS policies</a:t>
+              <a:rPr sz="1100" b="0">
+                <a:solidFill>
+                  <a:srgbClr val="FFFFFF"/>
+                </a:solidFill>
+                <a:latin typeface="Trebuchet MS"/>
+              </a:rPr>
+              <a:t>No LLM — deterministic statistics</a:t>
             </a:r>
           </a:p>
           <a:p>
             <a:pPr>
               <a:spcAft>
-                <a:spcPts val="200"/>
+                <a:spcPts val="1980"/>
               </a:spcAft>
             </a:pPr>
             <a:r>
-              <a:rPr sz="1100" b="0"/>
-              <a:t>No LLM — deterministic statistics, auditable</a:t>
+              <a:rPr sz="1100" b="0">
+                <a:solidFill>
+                  <a:srgbClr val="FFFFFF"/>
+                </a:solidFill>
+                <a:latin typeface="Trebuchet MS"/>
+              </a:rPr>
+              <a:t>70 tests · 27 DB · 120 end-to-end</a:t>
             </a:r>
           </a:p>
         </p:txBody>
@@ -4005,12 +3984,17 @@
                 <a:spcPts val="130"/>
               </a:spcBef>
               <a:spcAft>
-                <a:spcPts val="200"/>
+                <a:spcPts val="1979"/>
               </a:spcAft>
             </a:pPr>
             <a:r>
-              <a:rPr sz="1100" b="0"/>
-              <a:t>A QR scan shows what is genuinely available</a:t>
+              <a:rPr sz="1100" b="0">
+                <a:solidFill>
+                  <a:srgbClr val="FFFFFF"/>
+                </a:solidFill>
+                <a:latin typeface="Trebuchet MS"/>
+              </a:rPr>
+              <a:t>A QR scan shows what is available</a:t>
             </a:r>
             <a:endParaRPr sz="2750">
               <a:latin typeface="Trebuchet MS" panose="020B0603020202020204"/>
@@ -4020,45 +4004,65 @@
           <a:p>
             <a:pPr>
               <a:spcAft>
-                <a:spcPts val="200"/>
+                <a:spcPts val="1979"/>
               </a:spcAft>
             </a:pPr>
             <a:r>
-              <a:rPr sz="1100" b="0"/>
-              <a:t>Seven brigade roles, enforced in Postgres</a:t>
+              <a:rPr sz="1100" b="0">
+                <a:solidFill>
+                  <a:srgbClr val="FFFFFF"/>
+                </a:solidFill>
+                <a:latin typeface="Trebuchet MS"/>
+              </a:rPr>
+              <a:t>Seven roles, enforced in Postgres</a:t>
             </a:r>
           </a:p>
           <a:p>
             <a:pPr>
               <a:spcAft>
-                <a:spcPts val="200"/>
+                <a:spcPts val="1979"/>
               </a:spcAft>
             </a:pPr>
             <a:r>
-              <a:rPr sz="1100" b="0"/>
-              <a:t>Independent restaurants; multi-tenant already</a:t>
+              <a:rPr sz="1100" b="0">
+                <a:solidFill>
+                  <a:srgbClr val="FFFFFF"/>
+                </a:solidFill>
+                <a:latin typeface="Trebuchet MS"/>
+              </a:rPr>
+              <a:t>Independent restaurants; multi-tenant</a:t>
             </a:r>
           </a:p>
           <a:p>
             <a:pPr>
               <a:spcAft>
-                <a:spcPts val="200"/>
+                <a:spcPts val="1979"/>
               </a:spcAft>
             </a:pPr>
             <a:r>
-              <a:rPr sz="1100" b="0"/>
-              <a:t>Less waste, fewer dead orders, honest waits</a:t>
+              <a:rPr sz="1100" b="0">
+                <a:solidFill>
+                  <a:srgbClr val="FFFFFF"/>
+                </a:solidFill>
+                <a:latin typeface="Trebuchet MS"/>
+              </a:rPr>
+              <a:t>Less waste, honest waiting times</a:t>
             </a:r>
           </a:p>
           <a:p>
             <a:pPr>
               <a:spcAft>
-                <a:spcPts val="200"/>
+                <a:spcPts val="1979"/>
               </a:spcAft>
             </a:pPr>
             <a:r>
-              <a:rPr sz="1100" b="0"/>
-              <a:t>Every figure recomputed from the order ledger</a:t>
+              <a:rPr sz="1100" b="0">
+                <a:solidFill>
+                  <a:srgbClr val="FFFFFF"/>
+                </a:solidFill>
+                <a:latin typeface="Trebuchet MS"/>
+              </a:rPr>
+              <a:t>Every figure comes from the ledger</a:t>
             </a:r>
           </a:p>
         </p:txBody>
@@ -4118,7 +4122,12 @@
               </a:spcAft>
             </a:pPr>
             <a:r>
-              <a:rPr sz="1000" b="0"/>
+              <a:rPr sz="1000" b="0">
+                <a:solidFill>
+                  <a:srgbClr val="FFFFFF"/>
+                </a:solidFill>
+                <a:latin typeface="Trebuchet MS"/>
+              </a:rPr>
               <a:t>bishalranabr7</a:t>
             </a:r>
             <a:endParaRPr sz="1100">
@@ -4252,7 +4261,12 @@
               </a:spcAft>
             </a:pPr>
             <a:r>
-              <a:rPr sz="1000" b="0"/>
+              <a:rPr sz="1000" b="0">
+                <a:solidFill>
+                  <a:srgbClr val="FFFFFF"/>
+                </a:solidFill>
+                <a:latin typeface="Trebuchet MS"/>
+              </a:rPr>
               <a:t>bishalranabr7</a:t>
             </a:r>
             <a:endParaRPr sz="1100">
@@ -4462,12 +4476,17 @@
                 <a:spcPts val="130"/>
               </a:spcBef>
               <a:spcAft>
-                <a:spcPts val="200"/>
+                <a:spcPts val="1980"/>
               </a:spcAft>
             </a:pPr>
             <a:r>
-              <a:rPr sz="1100" b="0"/>
-              <a:t>Surface notifications and recommendations</a:t>
+              <a:rPr sz="1100" b="0">
+                <a:solidFill>
+                  <a:srgbClr val="FFFFFF"/>
+                </a:solidFill>
+                <a:latin typeface="Trebuchet MS"/>
+              </a:rPr>
+              <a:t>Surface notifications, recommendations</a:t>
             </a:r>
             <a:endParaRPr sz="2750">
               <a:latin typeface="Trebuchet MS" panose="020B0603020202020204"/>
@@ -4477,765 +4496,65 @@
           <a:p>
             <a:pPr>
               <a:spcAft>
-                <a:spcPts val="200"/>
+                <a:spcPts val="1980"/>
               </a:spcAft>
             </a:pPr>
             <a:r>
-              <a:rPr sz="1100" b="0"/>
-              <a:t>Supplier APIs, real payments, accounting export</a:t>
+              <a:rPr sz="1100" b="0">
+                <a:solidFill>
+                  <a:srgbClr val="FFFFFF"/>
+                </a:solidFill>
+                <a:latin typeface="Trebuchet MS"/>
+              </a:rPr>
+              <a:t>Supplier APIs, payments, accounting</a:t>
             </a:r>
           </a:p>
           <a:p>
             <a:pPr>
               <a:spcAft>
-                <a:spcPts val="200"/>
+                <a:spcPts val="1980"/>
               </a:spcAft>
             </a:pPr>
             <a:r>
-              <a:rPr sz="1100" b="0"/>
-              <a:t>Multi-tenant already — a second site is a row</a:t>
+              <a:rPr sz="1100" b="0">
+                <a:solidFill>
+                  <a:srgbClr val="FFFFFF"/>
+                </a:solidFill>
+                <a:latin typeface="Trebuchet MS"/>
+              </a:rPr>
+              <a:t>Multi-tenant — a second site is a row</a:t>
             </a:r>
           </a:p>
           <a:p>
             <a:pPr>
               <a:spcAft>
-                <a:spcPts val="200"/>
+                <a:spcPts val="1980"/>
               </a:spcAft>
             </a:pPr>
             <a:r>
-              <a:rPr sz="1100" b="0"/>
-              <a:t>Runway suits any perishable constraint</a:t>
+              <a:rPr sz="1100" b="0">
+                <a:solidFill>
+                  <a:srgbClr val="FFFFFF"/>
+                </a:solidFill>
+                <a:latin typeface="Trebuchet MS"/>
+              </a:rPr>
+              <a:t>Runway suits any perishable stock</a:t>
             </a:r>
           </a:p>
           <a:p>
             <a:pPr>
               <a:spcAft>
-                <a:spcPts val="200"/>
+                <a:spcPts val="1980"/>
               </a:spcAft>
             </a:pPr>
             <a:r>
-              <a:rPr sz="1100" b="0"/>
-              <a:t>Tills say a dish IS out. Brigade says when.</a:t>
-            </a:r>
-          </a:p>
-        </p:txBody>
-      </p:sp>
-      <p:pic>
-        <p:nvPicPr>
-          <p:cNvPr id="12" name="object 12"/>
-          <p:cNvPicPr/>
-          <p:nvPr/>
-        </p:nvPicPr>
-        <p:blipFill>
-          <a:blip r:embed="rId4" cstate="print"/>
-          <a:stretch>
-            <a:fillRect/>
-          </a:stretch>
-        </p:blipFill>
-        <p:spPr>
-          <a:xfrm>
-            <a:off x="3733800" y="1628775"/>
-            <a:ext cx="3981449" cy="4371974"/>
-          </a:xfrm>
-          <a:prstGeom prst="rect">
-            <a:avLst/>
-          </a:prstGeom>
-        </p:spPr>
-      </p:pic>
-    </p:spTree>
-  </p:cSld>
-  <p:clrMapOvr>
-    <a:masterClrMapping/>
-  </p:clrMapOvr>
-</p:sld>
-</file>
-
-<file path=ppt/slides/slide7.xml><?xml version="1.0" encoding="utf-8"?>
-<p:sld xmlns:a="http://schemas.openxmlformats.org/drawingml/2006/main" xmlns:p="http://schemas.openxmlformats.org/presentationml/2006/main" xmlns:r="http://schemas.openxmlformats.org/officeDocument/2006/relationships">
-  <p:cSld>
-    <p:spTree>
-      <p:nvGrpSpPr>
-        <p:cNvPr id="1" name=""/>
-        <p:cNvGrpSpPr/>
-        <p:nvPr/>
-      </p:nvGrpSpPr>
-      <p:grpSpPr/>
-      <p:pic>
-        <p:nvPicPr>
-          <p:cNvPr id="2" name="object 2"/>
-          <p:cNvPicPr/>
-          <p:nvPr/>
-        </p:nvPicPr>
-        <p:blipFill>
-          <a:blip r:embed="rId1" cstate="print"/>
-          <a:stretch>
-            <a:fillRect/>
-          </a:stretch>
-        </p:blipFill>
-        <p:spPr>
-          <a:xfrm>
-            <a:off x="11277599" y="0"/>
-            <a:ext cx="914399" cy="989409"/>
-          </a:xfrm>
-          <a:prstGeom prst="rect">
-            <a:avLst/>
-          </a:prstGeom>
-        </p:spPr>
-      </p:pic>
-      <p:sp>
-        <p:nvSpPr>
-          <p:cNvPr id="3" name="object 3" descr="$PPTXTitle"/>
-          <p:cNvSpPr txBox="1">
-            <a:spLocks noGrp="1"/>
-          </p:cNvSpPr>
-          <p:nvPr>
-            <p:ph type="title"/>
-          </p:nvPr>
-        </p:nvSpPr>
-        <p:spPr>
-          <a:prstGeom prst="rect">
-            <a:avLst/>
-          </a:prstGeom>
-        </p:spPr>
-        <p:txBody>
-          <a:bodyPr vert="horz" wrap="square" lIns="0" tIns="16510" rIns="0" bIns="0" rtlCol="0">
-            <a:spAutoFit/>
-          </a:bodyPr>
-          <a:lstStyle/>
-          <a:p>
-            <a:pPr marL="1871345">
-              <a:lnSpc>
-                <a:spcPct val="100000"/>
-              </a:lnSpc>
-              <a:spcBef>
-                <a:spcPts val="130"/>
-              </a:spcBef>
-            </a:pPr>
-            <a:r>
-              <a:t>How We Know It Works</a:t>
-            </a:r>
-            <a:endParaRPr spc="95" dirty="0"/>
-          </a:p>
-        </p:txBody>
-      </p:sp>
-      <p:pic>
-        <p:nvPicPr>
-          <p:cNvPr id="4" name="object 4"/>
-          <p:cNvPicPr/>
-          <p:nvPr/>
-        </p:nvPicPr>
-        <p:blipFill>
-          <a:blip r:embed="rId2" cstate="print"/>
-          <a:stretch>
-            <a:fillRect/>
-          </a:stretch>
-        </p:blipFill>
-        <p:spPr>
-          <a:xfrm>
-            <a:off x="41271" y="3171"/>
-            <a:ext cx="1485899" cy="1057274"/>
-          </a:xfrm>
-          <a:prstGeom prst="rect">
-            <a:avLst/>
-          </a:prstGeom>
-        </p:spPr>
-      </p:pic>
-      <p:sp>
-        <p:nvSpPr>
-          <p:cNvPr id="5" name="object 5"/>
-          <p:cNvSpPr txBox="1"/>
-          <p:nvPr/>
-        </p:nvSpPr>
-        <p:spPr>
-          <a:xfrm>
-            <a:off x="412114" y="301631"/>
-            <a:ext cx="793750" cy="425450"/>
-          </a:xfrm>
-          <a:prstGeom prst="rect">
-            <a:avLst/>
-          </a:prstGeom>
-        </p:spPr>
-        <p:txBody>
-          <a:bodyPr vert="horz" wrap="square" lIns="0" tIns="44450" rIns="0" bIns="0" rtlCol="0">
-            <a:spAutoFit/>
-          </a:bodyPr>
-          <a:lstStyle/>
-          <a:p>
-            <a:pPr marL="12700">
-              <a:lnSpc>
-                <a:spcPct val="100000"/>
-              </a:lnSpc>
-              <a:spcBef>
-                <a:spcPts val="350"/>
-              </a:spcBef>
-              <a:spcAft>
-                <a:spcPts val="200"/>
-              </a:spcAft>
-            </a:pPr>
-            <a:r>
-              <a:rPr sz="1000" b="0"/>
-              <a:t>bishalranabr7</a:t>
-            </a:r>
-            <a:endParaRPr sz="1100">
-              <a:latin typeface="Trebuchet MS" panose="020B0603020202020204"/>
-              <a:cs typeface="Trebuchet MS" panose="020B0603020202020204"/>
-            </a:endParaRPr>
-          </a:p>
-        </p:txBody>
-      </p:sp>
-      <p:pic>
-        <p:nvPicPr>
-          <p:cNvPr id="6" name="object 6"/>
-          <p:cNvPicPr/>
-          <p:nvPr/>
-        </p:nvPicPr>
-        <p:blipFill>
-          <a:blip r:embed="rId3" cstate="print"/>
-          <a:stretch>
-            <a:fillRect/>
-          </a:stretch>
-        </p:blipFill>
-        <p:spPr>
-          <a:xfrm>
-            <a:off x="1554873" y="2797731"/>
-            <a:ext cx="104775" cy="104774"/>
-          </a:xfrm>
-          <a:prstGeom prst="rect">
-            <a:avLst/>
-          </a:prstGeom>
-        </p:spPr>
-      </p:pic>
-      <p:pic>
-        <p:nvPicPr>
-          <p:cNvPr id="7" name="object 7"/>
-          <p:cNvPicPr/>
-          <p:nvPr/>
-        </p:nvPicPr>
-        <p:blipFill>
-          <a:blip r:embed="rId3" cstate="print"/>
-          <a:stretch>
-            <a:fillRect/>
-          </a:stretch>
-        </p:blipFill>
-        <p:spPr>
-          <a:xfrm>
-            <a:off x="1554873" y="3216831"/>
-            <a:ext cx="104775" cy="104774"/>
-          </a:xfrm>
-          <a:prstGeom prst="rect">
-            <a:avLst/>
-          </a:prstGeom>
-        </p:spPr>
-      </p:pic>
-      <p:pic>
-        <p:nvPicPr>
-          <p:cNvPr id="8" name="object 8"/>
-          <p:cNvPicPr/>
-          <p:nvPr/>
-        </p:nvPicPr>
-        <p:blipFill>
-          <a:blip r:embed="rId3" cstate="print"/>
-          <a:stretch>
-            <a:fillRect/>
-          </a:stretch>
-        </p:blipFill>
-        <p:spPr>
-          <a:xfrm>
-            <a:off x="1554873" y="3635931"/>
-            <a:ext cx="104775" cy="104774"/>
-          </a:xfrm>
-          <a:prstGeom prst="rect">
-            <a:avLst/>
-          </a:prstGeom>
-        </p:spPr>
-      </p:pic>
-      <p:pic>
-        <p:nvPicPr>
-          <p:cNvPr id="9" name="object 9"/>
-          <p:cNvPicPr/>
-          <p:nvPr/>
-        </p:nvPicPr>
-        <p:blipFill>
-          <a:blip r:embed="rId3" cstate="print"/>
-          <a:stretch>
-            <a:fillRect/>
-          </a:stretch>
-        </p:blipFill>
-        <p:spPr>
-          <a:xfrm>
-            <a:off x="1554873" y="4055031"/>
-            <a:ext cx="104775" cy="104774"/>
-          </a:xfrm>
-          <a:prstGeom prst="rect">
-            <a:avLst/>
-          </a:prstGeom>
-        </p:spPr>
-      </p:pic>
-      <p:pic>
-        <p:nvPicPr>
-          <p:cNvPr id="10" name="object 10"/>
-          <p:cNvPicPr/>
-          <p:nvPr/>
-        </p:nvPicPr>
-        <p:blipFill>
-          <a:blip r:embed="rId3" cstate="print"/>
-          <a:stretch>
-            <a:fillRect/>
-          </a:stretch>
-        </p:blipFill>
-        <p:spPr>
-          <a:xfrm>
-            <a:off x="1554873" y="4474131"/>
-            <a:ext cx="104775" cy="104774"/>
-          </a:xfrm>
-          <a:prstGeom prst="rect">
-            <a:avLst/>
-          </a:prstGeom>
-        </p:spPr>
-      </p:pic>
-      <p:sp>
-        <p:nvSpPr>
-          <p:cNvPr id="11" name="object 11"/>
-          <p:cNvSpPr txBox="1"/>
-          <p:nvPr/>
-        </p:nvSpPr>
-        <p:spPr>
-          <a:xfrm>
-            <a:off x="1818398" y="2584435"/>
-            <a:ext cx="3701415" cy="2132330"/>
-          </a:xfrm>
-          <a:prstGeom prst="rect">
-            <a:avLst/>
-          </a:prstGeom>
-        </p:spPr>
-        <p:txBody>
-          <a:bodyPr vert="horz" wrap="square" lIns="0" tIns="16510" rIns="0" bIns="0" rtlCol="0">
-            <a:spAutoFit/>
-          </a:bodyPr>
-          <a:lstStyle/>
-          <a:p>
-            <a:pPr marL="12700" marR="5080">
-              <a:lnSpc>
-                <a:spcPct val="100000"/>
-              </a:lnSpc>
-              <a:spcBef>
-                <a:spcPts val="130"/>
-              </a:spcBef>
-              <a:spcAft>
-                <a:spcPts val="200"/>
-              </a:spcAft>
-            </a:pPr>
-            <a:r>
-              <a:rPr sz="1100" b="0"/>
-              <a:t>npm run check — 7 questions in plain English</a:t>
-            </a:r>
-            <a:endParaRPr sz="2750">
-              <a:latin typeface="Trebuchet MS" panose="020B0603020202020204"/>
-              <a:cs typeface="Trebuchet MS" panose="020B0603020202020204"/>
-            </a:endParaRPr>
-          </a:p>
-          <a:p>
-            <a:pPr>
-              <a:spcAft>
-                <a:spcPts val="200"/>
-              </a:spcAft>
-            </a:pPr>
-            <a:r>
-              <a:rPr sz="1100" b="0"/>
-              <a:t>70 unit tests · 27 database assertions</a:t>
-            </a:r>
-          </a:p>
-          <a:p>
-            <a:pPr>
-              <a:spcAft>
-                <a:spcPts val="200"/>
-              </a:spcAft>
-            </a:pPr>
-            <a:r>
-              <a:rPr sz="1100" b="0"/>
-              <a:t>120 end-to-end assertions as the 10 real people</a:t>
-            </a:r>
-          </a:p>
-          <a:p>
-            <a:pPr>
-              <a:spcAft>
-                <a:spcPts val="200"/>
-              </a:spcAft>
-            </a:pPr>
-            <a:r>
-              <a:rPr sz="1100" b="0"/>
-              <a:t>22 read the rendered HTML: aria, links, dead ends</a:t>
-            </a:r>
-          </a:p>
-          <a:p>
-            <a:pPr>
-              <a:spcAft>
-                <a:spcPts val="200"/>
-              </a:spcAft>
-            </a:pPr>
-            <a:r>
-              <a:rPr sz="1100" b="0"/>
-              <a:t>Adversarial audit: 44 findings, each refuted</a:t>
-            </a:r>
-          </a:p>
-        </p:txBody>
-      </p:sp>
-      <p:pic>
-        <p:nvPicPr>
-          <p:cNvPr id="12" name="object 12"/>
-          <p:cNvPicPr/>
-          <p:nvPr/>
-        </p:nvPicPr>
-        <p:blipFill>
-          <a:blip r:embed="rId4" cstate="print"/>
-          <a:stretch>
-            <a:fillRect/>
-          </a:stretch>
-        </p:blipFill>
-        <p:spPr>
-          <a:xfrm>
-            <a:off x="3733800" y="1628775"/>
-            <a:ext cx="3981449" cy="4371974"/>
-          </a:xfrm>
-          <a:prstGeom prst="rect">
-            <a:avLst/>
-          </a:prstGeom>
-        </p:spPr>
-      </p:pic>
-    </p:spTree>
-  </p:cSld>
-  <p:clrMapOvr>
-    <a:masterClrMapping/>
-  </p:clrMapOvr>
-</p:sld>
-</file>
-
-<file path=ppt/slides/slide8.xml><?xml version="1.0" encoding="utf-8"?>
-<p:sld xmlns:a="http://schemas.openxmlformats.org/drawingml/2006/main" xmlns:p="http://schemas.openxmlformats.org/presentationml/2006/main" xmlns:r="http://schemas.openxmlformats.org/officeDocument/2006/relationships">
-  <p:cSld>
-    <p:spTree>
-      <p:nvGrpSpPr>
-        <p:cNvPr id="1" name=""/>
-        <p:cNvGrpSpPr/>
-        <p:nvPr/>
-      </p:nvGrpSpPr>
-      <p:grpSpPr/>
-      <p:pic>
-        <p:nvPicPr>
-          <p:cNvPr id="2" name="object 2"/>
-          <p:cNvPicPr/>
-          <p:nvPr/>
-        </p:nvPicPr>
-        <p:blipFill>
-          <a:blip r:embed="rId1" cstate="print"/>
-          <a:stretch>
-            <a:fillRect/>
-          </a:stretch>
-        </p:blipFill>
-        <p:spPr>
-          <a:xfrm>
-            <a:off x="11277599" y="0"/>
-            <a:ext cx="914399" cy="989409"/>
-          </a:xfrm>
-          <a:prstGeom prst="rect">
-            <a:avLst/>
-          </a:prstGeom>
-        </p:spPr>
-      </p:pic>
-      <p:sp>
-        <p:nvSpPr>
-          <p:cNvPr id="3" name="object 3" descr="$PPTXTitle"/>
-          <p:cNvSpPr txBox="1">
-            <a:spLocks noGrp="1"/>
-          </p:cNvSpPr>
-          <p:nvPr>
-            <p:ph type="title"/>
-          </p:nvPr>
-        </p:nvSpPr>
-        <p:spPr>
-          <a:prstGeom prst="rect">
-            <a:avLst/>
-          </a:prstGeom>
-        </p:spPr>
-        <p:txBody>
-          <a:bodyPr vert="horz" wrap="square" lIns="0" tIns="16510" rIns="0" bIns="0" rtlCol="0">
-            <a:spAutoFit/>
-          </a:bodyPr>
-          <a:lstStyle/>
-          <a:p>
-            <a:pPr marL="1871345">
-              <a:lnSpc>
-                <a:spcPct val="100000"/>
-              </a:lnSpc>
-              <a:spcBef>
-                <a:spcPts val="130"/>
-              </a:spcBef>
-            </a:pPr>
-            <a:r>
-              <a:t>Try It Yourself</a:t>
-            </a:r>
-            <a:endParaRPr spc="95" dirty="0"/>
-          </a:p>
-        </p:txBody>
-      </p:sp>
-      <p:pic>
-        <p:nvPicPr>
-          <p:cNvPr id="4" name="object 4"/>
-          <p:cNvPicPr/>
-          <p:nvPr/>
-        </p:nvPicPr>
-        <p:blipFill>
-          <a:blip r:embed="rId2" cstate="print"/>
-          <a:stretch>
-            <a:fillRect/>
-          </a:stretch>
-        </p:blipFill>
-        <p:spPr>
-          <a:xfrm>
-            <a:off x="41271" y="3171"/>
-            <a:ext cx="1485899" cy="1057274"/>
-          </a:xfrm>
-          <a:prstGeom prst="rect">
-            <a:avLst/>
-          </a:prstGeom>
-        </p:spPr>
-      </p:pic>
-      <p:sp>
-        <p:nvSpPr>
-          <p:cNvPr id="5" name="object 5"/>
-          <p:cNvSpPr txBox="1"/>
-          <p:nvPr/>
-        </p:nvSpPr>
-        <p:spPr>
-          <a:xfrm>
-            <a:off x="412114" y="301631"/>
-            <a:ext cx="793750" cy="425450"/>
-          </a:xfrm>
-          <a:prstGeom prst="rect">
-            <a:avLst/>
-          </a:prstGeom>
-        </p:spPr>
-        <p:txBody>
-          <a:bodyPr vert="horz" wrap="square" lIns="0" tIns="44450" rIns="0" bIns="0" rtlCol="0">
-            <a:spAutoFit/>
-          </a:bodyPr>
-          <a:lstStyle/>
-          <a:p>
-            <a:pPr marL="12700">
-              <a:lnSpc>
-                <a:spcPct val="100000"/>
-              </a:lnSpc>
-              <a:spcBef>
-                <a:spcPts val="350"/>
-              </a:spcBef>
-              <a:spcAft>
-                <a:spcPts val="200"/>
-              </a:spcAft>
-            </a:pPr>
-            <a:r>
-              <a:rPr sz="1000" b="0"/>
-              <a:t>bishalranabr7</a:t>
-            </a:r>
-            <a:endParaRPr sz="1100">
-              <a:latin typeface="Trebuchet MS" panose="020B0603020202020204"/>
-              <a:cs typeface="Trebuchet MS" panose="020B0603020202020204"/>
-            </a:endParaRPr>
-          </a:p>
-        </p:txBody>
-      </p:sp>
-      <p:pic>
-        <p:nvPicPr>
-          <p:cNvPr id="6" name="object 6"/>
-          <p:cNvPicPr/>
-          <p:nvPr/>
-        </p:nvPicPr>
-        <p:blipFill>
-          <a:blip r:embed="rId3" cstate="print"/>
-          <a:stretch>
-            <a:fillRect/>
-          </a:stretch>
-        </p:blipFill>
-        <p:spPr>
-          <a:xfrm>
-            <a:off x="1554873" y="2797731"/>
-            <a:ext cx="104775" cy="104774"/>
-          </a:xfrm>
-          <a:prstGeom prst="rect">
-            <a:avLst/>
-          </a:prstGeom>
-        </p:spPr>
-      </p:pic>
-      <p:pic>
-        <p:nvPicPr>
-          <p:cNvPr id="7" name="object 7"/>
-          <p:cNvPicPr/>
-          <p:nvPr/>
-        </p:nvPicPr>
-        <p:blipFill>
-          <a:blip r:embed="rId3" cstate="print"/>
-          <a:stretch>
-            <a:fillRect/>
-          </a:stretch>
-        </p:blipFill>
-        <p:spPr>
-          <a:xfrm>
-            <a:off x="1554873" y="3216831"/>
-            <a:ext cx="104775" cy="104774"/>
-          </a:xfrm>
-          <a:prstGeom prst="rect">
-            <a:avLst/>
-          </a:prstGeom>
-        </p:spPr>
-      </p:pic>
-      <p:pic>
-        <p:nvPicPr>
-          <p:cNvPr id="8" name="object 8"/>
-          <p:cNvPicPr/>
-          <p:nvPr/>
-        </p:nvPicPr>
-        <p:blipFill>
-          <a:blip r:embed="rId3" cstate="print"/>
-          <a:stretch>
-            <a:fillRect/>
-          </a:stretch>
-        </p:blipFill>
-        <p:spPr>
-          <a:xfrm>
-            <a:off x="1554873" y="3635931"/>
-            <a:ext cx="104775" cy="104774"/>
-          </a:xfrm>
-          <a:prstGeom prst="rect">
-            <a:avLst/>
-          </a:prstGeom>
-        </p:spPr>
-      </p:pic>
-      <p:pic>
-        <p:nvPicPr>
-          <p:cNvPr id="9" name="object 9"/>
-          <p:cNvPicPr/>
-          <p:nvPr/>
-        </p:nvPicPr>
-        <p:blipFill>
-          <a:blip r:embed="rId3" cstate="print"/>
-          <a:stretch>
-            <a:fillRect/>
-          </a:stretch>
-        </p:blipFill>
-        <p:spPr>
-          <a:xfrm>
-            <a:off x="1554873" y="4055031"/>
-            <a:ext cx="104775" cy="104774"/>
-          </a:xfrm>
-          <a:prstGeom prst="rect">
-            <a:avLst/>
-          </a:prstGeom>
-        </p:spPr>
-      </p:pic>
-      <p:pic>
-        <p:nvPicPr>
-          <p:cNvPr id="10" name="object 10"/>
-          <p:cNvPicPr/>
-          <p:nvPr/>
-        </p:nvPicPr>
-        <p:blipFill>
-          <a:blip r:embed="rId3" cstate="print"/>
-          <a:stretch>
-            <a:fillRect/>
-          </a:stretch>
-        </p:blipFill>
-        <p:spPr>
-          <a:xfrm>
-            <a:off x="1554873" y="4474131"/>
-            <a:ext cx="104775" cy="104774"/>
-          </a:xfrm>
-          <a:prstGeom prst="rect">
-            <a:avLst/>
-          </a:prstGeom>
-        </p:spPr>
-      </p:pic>
-      <p:sp>
-        <p:nvSpPr>
-          <p:cNvPr id="11" name="object 11"/>
-          <p:cNvSpPr txBox="1"/>
-          <p:nvPr/>
-        </p:nvSpPr>
-        <p:spPr>
-          <a:xfrm>
-            <a:off x="1818398" y="2584435"/>
-            <a:ext cx="3701415" cy="2132330"/>
-          </a:xfrm>
-          <a:prstGeom prst="rect">
-            <a:avLst/>
-          </a:prstGeom>
-        </p:spPr>
-        <p:txBody>
-          <a:bodyPr vert="horz" wrap="square" lIns="0" tIns="16510" rIns="0" bIns="0" rtlCol="0">
-            <a:spAutoFit/>
-          </a:bodyPr>
-          <a:lstStyle/>
-          <a:p>
-            <a:pPr marL="12700" marR="5080">
-              <a:lnSpc>
-                <a:spcPct val="100000"/>
-              </a:lnSpc>
-              <a:spcBef>
-                <a:spcPts val="130"/>
-              </a:spcBef>
-              <a:spcAft>
-                <a:spcPts val="200"/>
-              </a:spcAft>
-            </a:pPr>
-            <a:r>
-              <a:rPr sz="1100" b="0"/>
-              <a:t>brigade-flame.vercel.app — live now</a:t>
-            </a:r>
-            <a:endParaRPr sz="2750">
-              <a:latin typeface="Trebuchet MS" panose="020B0603020202020204"/>
-              <a:cs typeface="Trebuchet MS" panose="020B0603020202020204"/>
-            </a:endParaRPr>
-          </a:p>
-          <a:p>
-            <a:pPr>
-              <a:spcAft>
-                <a:spcPts val="200"/>
-              </a:spcAft>
-            </a:pPr>
-            <a:r>
-              <a:rPr sz="1100" b="0"/>
-              <a:t>Logins: owner@ manager@ grill@ expo@ priya@</a:t>
-            </a:r>
-          </a:p>
-          <a:p>
-            <a:pPr>
-              <a:spcAft>
-                <a:spcPts val="200"/>
-              </a:spcAft>
-            </a:pPr>
-            <a:r>
-              <a:rPr sz="1100" b="0"/>
-              <a:t>…@brigade.test · pass brigade-demo-2026</a:t>
-            </a:r>
-          </a:p>
-          <a:p>
-            <a:pPr>
-              <a:spcAft>
-                <a:spcPts val="200"/>
-              </a:spcAft>
-            </a:pPr>
-            <a:r>
-              <a:rPr sz="1100" b="0"/>
-              <a:t>Menu says 3 left; board says 86s ~19:46</a:t>
-            </a:r>
-          </a:p>
-          <a:p>
-            <a:pPr>
-              <a:spcAft>
-                <a:spcPts val="200"/>
-              </a:spcAft>
-            </a:pPr>
-            <a:r>
-              <a:rPr sz="1100" b="0"/>
-              <a:t>A chef cannot serve a plate — the pass can</a:t>
+              <a:rPr sz="1100" b="0">
+                <a:solidFill>
+                  <a:srgbClr val="FFFFFF"/>
+                </a:solidFill>
+                <a:latin typeface="Trebuchet MS"/>
+              </a:rPr>
+              <a:t>Tills say a dish IS out. We say when.</a:t>
             </a:r>
           </a:p>
         </p:txBody>
